--- a/UHNW_Portfolio_Presentation.pptx
+++ b/UHNW_Portfolio_Presentation.pptx
@@ -4,6 +4,9 @@
   <p:sldMasterIdLst>
     <p:sldMasterId id="2147483648" r:id="rId1"/>
   </p:sldMasterIdLst>
+  <p:notesMasterIdLst>
+    <p:notesMasterId r:id="rId13"/>
+  </p:notesMasterIdLst>
   <p:sldIdLst>
     <p:sldId id="256" r:id="rId2"/>
     <p:sldId id="257" r:id="rId3"/>
@@ -131,6 +134,523 @@
     </p:ext>
   </p:extLst>
 </p:presentation>
+</file>
+
+<file path=ppt/notesMasters/notesMaster1.xml><?xml version="1.0" encoding="utf-8"?>
+<p:notesMaster xmlns:a="http://schemas.openxmlformats.org/drawingml/2006/main" xmlns:r="http://schemas.openxmlformats.org/officeDocument/2006/relationships" xmlns:p="http://schemas.openxmlformats.org/presentationml/2006/main">
+  <p:cSld>
+    <p:bg>
+      <p:bgRef idx="1001">
+        <a:schemeClr val="bg1"/>
+      </p:bgRef>
+    </p:bg>
+    <p:spTree>
+      <p:nvGrpSpPr>
+        <p:cNvPr id="1" name=""/>
+        <p:cNvGrpSpPr/>
+        <p:nvPr/>
+      </p:nvGrpSpPr>
+      <p:grpSpPr>
+        <a:xfrm>
+          <a:off x="0" y="0"/>
+          <a:ext cx="0" cy="0"/>
+          <a:chOff x="0" y="0"/>
+          <a:chExt cx="0" cy="0"/>
+        </a:xfrm>
+      </p:grpSpPr>
+      <p:sp>
+        <p:nvSpPr>
+          <p:cNvPr id="2" name="Header Placeholder 1"/>
+          <p:cNvSpPr>
+            <a:spLocks noGrp="1"/>
+          </p:cNvSpPr>
+          <p:nvPr>
+            <p:ph type="hdr" sz="quarter"/>
+          </p:nvPr>
+        </p:nvSpPr>
+        <p:spPr>
+          <a:xfrm>
+            <a:off x="0" y="0"/>
+            <a:ext cx="2971800" cy="458788"/>
+          </a:xfrm>
+          <a:prstGeom prst="rect">
+            <a:avLst/>
+          </a:prstGeom>
+        </p:spPr>
+        <p:txBody>
+          <a:bodyPr vert="horz" lIns="91440" tIns="45720" rIns="91440" bIns="45720" rtlCol="0"/>
+          <a:lstStyle>
+            <a:lvl1pPr algn="l">
+              <a:defRPr sz="1200"/>
+            </a:lvl1pPr>
+          </a:lstStyle>
+          <a:p>
+            <a:endParaRPr lang="en-US"/>
+          </a:p>
+        </p:txBody>
+      </p:sp>
+      <p:sp>
+        <p:nvSpPr>
+          <p:cNvPr id="3" name="Date Placeholder 2"/>
+          <p:cNvSpPr>
+            <a:spLocks noGrp="1"/>
+          </p:cNvSpPr>
+          <p:nvPr>
+            <p:ph type="dt" idx="1"/>
+          </p:nvPr>
+        </p:nvSpPr>
+        <p:spPr>
+          <a:xfrm>
+            <a:off x="3884613" y="0"/>
+            <a:ext cx="2971800" cy="458788"/>
+          </a:xfrm>
+          <a:prstGeom prst="rect">
+            <a:avLst/>
+          </a:prstGeom>
+        </p:spPr>
+        <p:txBody>
+          <a:bodyPr vert="horz" lIns="91440" tIns="45720" rIns="91440" bIns="45720" rtlCol="0"/>
+          <a:lstStyle>
+            <a:lvl1pPr algn="r">
+              <a:defRPr sz="1200"/>
+            </a:lvl1pPr>
+          </a:lstStyle>
+          <a:p>
+            <a:fld id="{78914730-0DD5-EB4A-B648-B0A8C9AD656D}" type="datetimeFigureOut">
+              <a:rPr lang="en-US" smtClean="0"/>
+              <a:t>2/19/26</a:t>
+            </a:fld>
+            <a:endParaRPr lang="en-US"/>
+          </a:p>
+        </p:txBody>
+      </p:sp>
+      <p:sp>
+        <p:nvSpPr>
+          <p:cNvPr id="4" name="Slide Image Placeholder 3"/>
+          <p:cNvSpPr>
+            <a:spLocks noGrp="1" noRot="1" noChangeAspect="1"/>
+          </p:cNvSpPr>
+          <p:nvPr>
+            <p:ph type="sldImg" idx="2"/>
+          </p:nvPr>
+        </p:nvSpPr>
+        <p:spPr>
+          <a:xfrm>
+            <a:off x="685800" y="1143000"/>
+            <a:ext cx="5486400" cy="3086100"/>
+          </a:xfrm>
+          <a:prstGeom prst="rect">
+            <a:avLst/>
+          </a:prstGeom>
+          <a:noFill/>
+          <a:ln w="12700">
+            <a:solidFill>
+              <a:prstClr val="black"/>
+            </a:solidFill>
+          </a:ln>
+        </p:spPr>
+        <p:txBody>
+          <a:bodyPr vert="horz" lIns="91440" tIns="45720" rIns="91440" bIns="45720" rtlCol="0" anchor="ctr"/>
+          <a:lstStyle/>
+          <a:p>
+            <a:endParaRPr lang="en-US"/>
+          </a:p>
+        </p:txBody>
+      </p:sp>
+      <p:sp>
+        <p:nvSpPr>
+          <p:cNvPr id="5" name="Notes Placeholder 4"/>
+          <p:cNvSpPr>
+            <a:spLocks noGrp="1"/>
+          </p:cNvSpPr>
+          <p:nvPr>
+            <p:ph type="body" sz="quarter" idx="3"/>
+          </p:nvPr>
+        </p:nvSpPr>
+        <p:spPr>
+          <a:xfrm>
+            <a:off x="685800" y="4400550"/>
+            <a:ext cx="5486400" cy="3600450"/>
+          </a:xfrm>
+          <a:prstGeom prst="rect">
+            <a:avLst/>
+          </a:prstGeom>
+        </p:spPr>
+        <p:txBody>
+          <a:bodyPr vert="horz" lIns="91440" tIns="45720" rIns="91440" bIns="45720" rtlCol="0"/>
+          <a:lstStyle/>
+          <a:p>
+            <a:pPr lvl="0"/>
+            <a:r>
+              <a:rPr lang="en-US"/>
+              <a:t>Click to edit Master text styles</a:t>
+            </a:r>
+          </a:p>
+          <a:p>
+            <a:pPr lvl="1"/>
+            <a:r>
+              <a:rPr lang="en-US"/>
+              <a:t>Second level</a:t>
+            </a:r>
+          </a:p>
+          <a:p>
+            <a:pPr lvl="2"/>
+            <a:r>
+              <a:rPr lang="en-US"/>
+              <a:t>Third level</a:t>
+            </a:r>
+          </a:p>
+          <a:p>
+            <a:pPr lvl="3"/>
+            <a:r>
+              <a:rPr lang="en-US"/>
+              <a:t>Fourth level</a:t>
+            </a:r>
+          </a:p>
+          <a:p>
+            <a:pPr lvl="4"/>
+            <a:r>
+              <a:rPr lang="en-US"/>
+              <a:t>Fifth level</a:t>
+            </a:r>
+          </a:p>
+        </p:txBody>
+      </p:sp>
+      <p:sp>
+        <p:nvSpPr>
+          <p:cNvPr id="6" name="Footer Placeholder 5"/>
+          <p:cNvSpPr>
+            <a:spLocks noGrp="1"/>
+          </p:cNvSpPr>
+          <p:nvPr>
+            <p:ph type="ftr" sz="quarter" idx="4"/>
+          </p:nvPr>
+        </p:nvSpPr>
+        <p:spPr>
+          <a:xfrm>
+            <a:off x="0" y="8685213"/>
+            <a:ext cx="2971800" cy="458787"/>
+          </a:xfrm>
+          <a:prstGeom prst="rect">
+            <a:avLst/>
+          </a:prstGeom>
+        </p:spPr>
+        <p:txBody>
+          <a:bodyPr vert="horz" lIns="91440" tIns="45720" rIns="91440" bIns="45720" rtlCol="0" anchor="b"/>
+          <a:lstStyle>
+            <a:lvl1pPr algn="l">
+              <a:defRPr sz="1200"/>
+            </a:lvl1pPr>
+          </a:lstStyle>
+          <a:p>
+            <a:endParaRPr lang="en-US"/>
+          </a:p>
+        </p:txBody>
+      </p:sp>
+      <p:sp>
+        <p:nvSpPr>
+          <p:cNvPr id="7" name="Slide Number Placeholder 6"/>
+          <p:cNvSpPr>
+            <a:spLocks noGrp="1"/>
+          </p:cNvSpPr>
+          <p:nvPr>
+            <p:ph type="sldNum" sz="quarter" idx="5"/>
+          </p:nvPr>
+        </p:nvSpPr>
+        <p:spPr>
+          <a:xfrm>
+            <a:off x="3884613" y="8685213"/>
+            <a:ext cx="2971800" cy="458787"/>
+          </a:xfrm>
+          <a:prstGeom prst="rect">
+            <a:avLst/>
+          </a:prstGeom>
+        </p:spPr>
+        <p:txBody>
+          <a:bodyPr vert="horz" lIns="91440" tIns="45720" rIns="91440" bIns="45720" rtlCol="0" anchor="b"/>
+          <a:lstStyle>
+            <a:lvl1pPr algn="r">
+              <a:defRPr sz="1200"/>
+            </a:lvl1pPr>
+          </a:lstStyle>
+          <a:p>
+            <a:fld id="{82F15F89-79F7-374C-8D42-95E57E4D3FD7}" type="slidenum">
+              <a:rPr lang="en-US" smtClean="0"/>
+              <a:t>‹#›</a:t>
+            </a:fld>
+            <a:endParaRPr lang="en-US"/>
+          </a:p>
+        </p:txBody>
+      </p:sp>
+    </p:spTree>
+    <p:extLst>
+      <p:ext uri="{BB962C8B-B14F-4D97-AF65-F5344CB8AC3E}">
+        <p14:creationId xmlns:p14="http://schemas.microsoft.com/office/powerpoint/2010/main" val="182759778"/>
+      </p:ext>
+    </p:extLst>
+  </p:cSld>
+  <p:clrMap bg1="lt1" tx1="dk1" bg2="lt2" tx2="dk2" accent1="accent1" accent2="accent2" accent3="accent3" accent4="accent4" accent5="accent5" accent6="accent6" hlink="hlink" folHlink="folHlink"/>
+  <p:notesStyle>
+    <a:lvl1pPr marL="0" algn="l" defTabSz="914400" rtl="0" eaLnBrk="1" latinLnBrk="0" hangingPunct="1">
+      <a:defRPr sz="1200" kern="1200">
+        <a:solidFill>
+          <a:schemeClr val="tx1"/>
+        </a:solidFill>
+        <a:latin typeface="+mn-lt"/>
+        <a:ea typeface="+mn-ea"/>
+        <a:cs typeface="+mn-cs"/>
+      </a:defRPr>
+    </a:lvl1pPr>
+    <a:lvl2pPr marL="457200" algn="l" defTabSz="914400" rtl="0" eaLnBrk="1" latinLnBrk="0" hangingPunct="1">
+      <a:defRPr sz="1200" kern="1200">
+        <a:solidFill>
+          <a:schemeClr val="tx1"/>
+        </a:solidFill>
+        <a:latin typeface="+mn-lt"/>
+        <a:ea typeface="+mn-ea"/>
+        <a:cs typeface="+mn-cs"/>
+      </a:defRPr>
+    </a:lvl2pPr>
+    <a:lvl3pPr marL="914400" algn="l" defTabSz="914400" rtl="0" eaLnBrk="1" latinLnBrk="0" hangingPunct="1">
+      <a:defRPr sz="1200" kern="1200">
+        <a:solidFill>
+          <a:schemeClr val="tx1"/>
+        </a:solidFill>
+        <a:latin typeface="+mn-lt"/>
+        <a:ea typeface="+mn-ea"/>
+        <a:cs typeface="+mn-cs"/>
+      </a:defRPr>
+    </a:lvl3pPr>
+    <a:lvl4pPr marL="1371600" algn="l" defTabSz="914400" rtl="0" eaLnBrk="1" latinLnBrk="0" hangingPunct="1">
+      <a:defRPr sz="1200" kern="1200">
+        <a:solidFill>
+          <a:schemeClr val="tx1"/>
+        </a:solidFill>
+        <a:latin typeface="+mn-lt"/>
+        <a:ea typeface="+mn-ea"/>
+        <a:cs typeface="+mn-cs"/>
+      </a:defRPr>
+    </a:lvl4pPr>
+    <a:lvl5pPr marL="1828800" algn="l" defTabSz="914400" rtl="0" eaLnBrk="1" latinLnBrk="0" hangingPunct="1">
+      <a:defRPr sz="1200" kern="1200">
+        <a:solidFill>
+          <a:schemeClr val="tx1"/>
+        </a:solidFill>
+        <a:latin typeface="+mn-lt"/>
+        <a:ea typeface="+mn-ea"/>
+        <a:cs typeface="+mn-cs"/>
+      </a:defRPr>
+    </a:lvl5pPr>
+    <a:lvl6pPr marL="2286000" algn="l" defTabSz="914400" rtl="0" eaLnBrk="1" latinLnBrk="0" hangingPunct="1">
+      <a:defRPr sz="1200" kern="1200">
+        <a:solidFill>
+          <a:schemeClr val="tx1"/>
+        </a:solidFill>
+        <a:latin typeface="+mn-lt"/>
+        <a:ea typeface="+mn-ea"/>
+        <a:cs typeface="+mn-cs"/>
+      </a:defRPr>
+    </a:lvl6pPr>
+    <a:lvl7pPr marL="2743200" algn="l" defTabSz="914400" rtl="0" eaLnBrk="1" latinLnBrk="0" hangingPunct="1">
+      <a:defRPr sz="1200" kern="1200">
+        <a:solidFill>
+          <a:schemeClr val="tx1"/>
+        </a:solidFill>
+        <a:latin typeface="+mn-lt"/>
+        <a:ea typeface="+mn-ea"/>
+        <a:cs typeface="+mn-cs"/>
+      </a:defRPr>
+    </a:lvl7pPr>
+    <a:lvl8pPr marL="3200400" algn="l" defTabSz="914400" rtl="0" eaLnBrk="1" latinLnBrk="0" hangingPunct="1">
+      <a:defRPr sz="1200" kern="1200">
+        <a:solidFill>
+          <a:schemeClr val="tx1"/>
+        </a:solidFill>
+        <a:latin typeface="+mn-lt"/>
+        <a:ea typeface="+mn-ea"/>
+        <a:cs typeface="+mn-cs"/>
+      </a:defRPr>
+    </a:lvl8pPr>
+    <a:lvl9pPr marL="3657600" algn="l" defTabSz="914400" rtl="0" eaLnBrk="1" latinLnBrk="0" hangingPunct="1">
+      <a:defRPr sz="1200" kern="1200">
+        <a:solidFill>
+          <a:schemeClr val="tx1"/>
+        </a:solidFill>
+        <a:latin typeface="+mn-lt"/>
+        <a:ea typeface="+mn-ea"/>
+        <a:cs typeface="+mn-cs"/>
+      </a:defRPr>
+    </a:lvl9pPr>
+  </p:notesStyle>
+</p:notesMaster>
+</file>
+
+<file path=ppt/notesSlides/notesSlide1.xml><?xml version="1.0" encoding="utf-8"?>
+<p:notes xmlns:a="http://schemas.openxmlformats.org/drawingml/2006/main" xmlns:r="http://schemas.openxmlformats.org/officeDocument/2006/relationships" xmlns:p="http://schemas.openxmlformats.org/presentationml/2006/main">
+  <p:cSld>
+    <p:spTree>
+      <p:nvGrpSpPr>
+        <p:cNvPr id="1" name=""/>
+        <p:cNvGrpSpPr/>
+        <p:nvPr/>
+      </p:nvGrpSpPr>
+      <p:grpSpPr>
+        <a:xfrm>
+          <a:off x="0" y="0"/>
+          <a:ext cx="0" cy="0"/>
+          <a:chOff x="0" y="0"/>
+          <a:chExt cx="0" cy="0"/>
+        </a:xfrm>
+      </p:grpSpPr>
+      <p:sp>
+        <p:nvSpPr>
+          <p:cNvPr id="2" name="Slide Image Placeholder 1"/>
+          <p:cNvSpPr>
+            <a:spLocks noGrp="1" noRot="1" noChangeAspect="1"/>
+          </p:cNvSpPr>
+          <p:nvPr>
+            <p:ph type="sldImg"/>
+          </p:nvPr>
+        </p:nvSpPr>
+        <p:spPr/>
+      </p:sp>
+      <p:sp>
+        <p:nvSpPr>
+          <p:cNvPr id="3" name="Notes Placeholder 2"/>
+          <p:cNvSpPr>
+            <a:spLocks noGrp="1"/>
+          </p:cNvSpPr>
+          <p:nvPr>
+            <p:ph type="body" idx="1"/>
+          </p:nvPr>
+        </p:nvSpPr>
+        <p:spPr/>
+        <p:txBody>
+          <a:bodyPr/>
+          <a:lstStyle/>
+          <a:p>
+            <a:endParaRPr lang="en-US" dirty="0"/>
+          </a:p>
+        </p:txBody>
+      </p:sp>
+      <p:sp>
+        <p:nvSpPr>
+          <p:cNvPr id="4" name="Slide Number Placeholder 3"/>
+          <p:cNvSpPr>
+            <a:spLocks noGrp="1"/>
+          </p:cNvSpPr>
+          <p:nvPr>
+            <p:ph type="sldNum" sz="quarter" idx="5"/>
+          </p:nvPr>
+        </p:nvSpPr>
+        <p:spPr/>
+        <p:txBody>
+          <a:bodyPr/>
+          <a:lstStyle/>
+          <a:p>
+            <a:fld id="{82F15F89-79F7-374C-8D42-95E57E4D3FD7}" type="slidenum">
+              <a:rPr lang="en-US" smtClean="0"/>
+              <a:t>9</a:t>
+            </a:fld>
+            <a:endParaRPr lang="en-US"/>
+          </a:p>
+        </p:txBody>
+      </p:sp>
+    </p:spTree>
+    <p:extLst>
+      <p:ext uri="{BB962C8B-B14F-4D97-AF65-F5344CB8AC3E}">
+        <p14:creationId xmlns:p14="http://schemas.microsoft.com/office/powerpoint/2010/main" val="3568683748"/>
+      </p:ext>
+    </p:extLst>
+  </p:cSld>
+  <p:clrMapOvr>
+    <a:masterClrMapping/>
+  </p:clrMapOvr>
+</p:notes>
+</file>
+
+<file path=ppt/notesSlides/notesSlide2.xml><?xml version="1.0" encoding="utf-8"?>
+<p:notes xmlns:a="http://schemas.openxmlformats.org/drawingml/2006/main" xmlns:r="http://schemas.openxmlformats.org/officeDocument/2006/relationships" xmlns:p="http://schemas.openxmlformats.org/presentationml/2006/main">
+  <p:cSld>
+    <p:spTree>
+      <p:nvGrpSpPr>
+        <p:cNvPr id="1" name=""/>
+        <p:cNvGrpSpPr/>
+        <p:nvPr/>
+      </p:nvGrpSpPr>
+      <p:grpSpPr>
+        <a:xfrm>
+          <a:off x="0" y="0"/>
+          <a:ext cx="0" cy="0"/>
+          <a:chOff x="0" y="0"/>
+          <a:chExt cx="0" cy="0"/>
+        </a:xfrm>
+      </p:grpSpPr>
+      <p:sp>
+        <p:nvSpPr>
+          <p:cNvPr id="2" name="Slide Image Placeholder 1"/>
+          <p:cNvSpPr>
+            <a:spLocks noGrp="1" noRot="1" noChangeAspect="1"/>
+          </p:cNvSpPr>
+          <p:nvPr>
+            <p:ph type="sldImg"/>
+          </p:nvPr>
+        </p:nvSpPr>
+        <p:spPr/>
+      </p:sp>
+      <p:sp>
+        <p:nvSpPr>
+          <p:cNvPr id="3" name="Notes Placeholder 2"/>
+          <p:cNvSpPr>
+            <a:spLocks noGrp="1"/>
+          </p:cNvSpPr>
+          <p:nvPr>
+            <p:ph type="body" idx="1"/>
+          </p:nvPr>
+        </p:nvSpPr>
+        <p:spPr/>
+        <p:txBody>
+          <a:bodyPr/>
+          <a:lstStyle/>
+          <a:p>
+            <a:endParaRPr lang="en-US" dirty="0"/>
+          </a:p>
+        </p:txBody>
+      </p:sp>
+      <p:sp>
+        <p:nvSpPr>
+          <p:cNvPr id="4" name="Slide Number Placeholder 3"/>
+          <p:cNvSpPr>
+            <a:spLocks noGrp="1"/>
+          </p:cNvSpPr>
+          <p:nvPr>
+            <p:ph type="sldNum" sz="quarter" idx="5"/>
+          </p:nvPr>
+        </p:nvSpPr>
+        <p:spPr/>
+        <p:txBody>
+          <a:bodyPr/>
+          <a:lstStyle/>
+          <a:p>
+            <a:fld id="{82F15F89-79F7-374C-8D42-95E57E4D3FD7}" type="slidenum">
+              <a:rPr lang="en-US" smtClean="0"/>
+              <a:t>11</a:t>
+            </a:fld>
+            <a:endParaRPr lang="en-US"/>
+          </a:p>
+        </p:txBody>
+      </p:sp>
+    </p:spTree>
+    <p:extLst>
+      <p:ext uri="{BB962C8B-B14F-4D97-AF65-F5344CB8AC3E}">
+        <p14:creationId xmlns:p14="http://schemas.microsoft.com/office/powerpoint/2010/main" val="1414328884"/>
+      </p:ext>
+    </p:extLst>
+  </p:cSld>
+  <p:clrMapOvr>
+    <a:masterClrMapping/>
+  </p:clrMapOvr>
+</p:notes>
 </file>
 
 <file path=ppt/slideLayouts/slideLayout1.xml><?xml version="1.0" encoding="utf-8"?>
@@ -7948,29 +8468,38 @@
         <p:spPr>
           <a:xfrm>
             <a:off x="411480" y="3227832"/>
-            <a:ext cx="320040" cy="365760"/>
-          </a:xfrm>
-          <a:prstGeom prst="rect">
-            <a:avLst/>
-          </a:prstGeom>
-          <a:noFill/>
-        </p:spPr>
-        <p:txBody>
-          <a:bodyPr wrap="square">
-            <a:spAutoFit/>
-          </a:bodyPr>
-          <a:lstStyle/>
-          <a:p>
-            <a:pPr algn="ctr"/>
-            <a:r>
-              <a:rPr sz="1200" b="1" i="0">
+            <a:ext cx="320040" cy="461665"/>
+          </a:xfrm>
+          <a:prstGeom prst="rect">
+            <a:avLst/>
+          </a:prstGeom>
+          <a:noFill/>
+        </p:spPr>
+        <p:txBody>
+          <a:bodyPr wrap="square">
+            <a:spAutoFit/>
+          </a:bodyPr>
+          <a:lstStyle/>
+          <a:p>
+            <a:pPr algn="ctr"/>
+            <a:r>
+              <a:rPr lang="en-US" sz="1200" b="1" i="0" dirty="0">
                 <a:solidFill>
                   <a:srgbClr val="002D72"/>
                 </a:solidFill>
                 <a:latin typeface="Calibri"/>
               </a:rPr>
-              <a:t>01</a:t>
-            </a:r>
+              <a:t>1</a:t>
+            </a:r>
+          </a:p>
+          <a:p>
+            <a:pPr algn="ctr"/>
+            <a:endParaRPr sz="1200" b="1" i="0" dirty="0">
+              <a:solidFill>
+                <a:srgbClr val="002D72"/>
+              </a:solidFill>
+              <a:latin typeface="Calibri"/>
+            </a:endParaRPr>
           </a:p>
         </p:txBody>
       </p:sp>
@@ -7983,7 +8512,7 @@
         <p:spPr>
           <a:xfrm>
             <a:off x="841248" y="3118104"/>
-            <a:ext cx="10789920" cy="292608"/>
+            <a:ext cx="10789920" cy="276999"/>
           </a:xfrm>
           <a:prstGeom prst="rect">
             <a:avLst/>
@@ -7998,13 +8527,13 @@
           <a:p>
             <a:pPr algn="l"/>
             <a:r>
-              <a:rPr sz="1200" b="1" i="0">
+              <a:rPr sz="1200" b="1" i="0" dirty="0">
                 <a:solidFill>
                   <a:srgbClr val="FFFFFF"/>
                 </a:solidFill>
                 <a:latin typeface="Calibri"/>
               </a:rPr>
-              <a:t>Sign Investment Policy Statement</a:t>
+              <a:t>Investment Policy Statement</a:t>
             </a:r>
           </a:p>
         </p:txBody>
@@ -8141,29 +8670,35 @@
         <p:spPr>
           <a:xfrm>
             <a:off x="411480" y="4050791"/>
-            <a:ext cx="320040" cy="365760"/>
-          </a:xfrm>
-          <a:prstGeom prst="rect">
-            <a:avLst/>
-          </a:prstGeom>
-          <a:noFill/>
-        </p:spPr>
-        <p:txBody>
-          <a:bodyPr wrap="square">
-            <a:spAutoFit/>
-          </a:bodyPr>
-          <a:lstStyle/>
-          <a:p>
-            <a:pPr algn="ctr"/>
-            <a:r>
-              <a:rPr sz="1200" b="1" i="0">
+            <a:ext cx="320040" cy="276999"/>
+          </a:xfrm>
+          <a:prstGeom prst="rect">
+            <a:avLst/>
+          </a:prstGeom>
+          <a:noFill/>
+        </p:spPr>
+        <p:txBody>
+          <a:bodyPr wrap="square">
+            <a:spAutoFit/>
+          </a:bodyPr>
+          <a:lstStyle/>
+          <a:p>
+            <a:pPr algn="ctr"/>
+            <a:r>
+              <a:rPr lang="en-US" sz="1200" b="1" i="0" dirty="0">
                 <a:solidFill>
                   <a:srgbClr val="002D72"/>
                 </a:solidFill>
                 <a:latin typeface="Calibri"/>
               </a:rPr>
-              <a:t>02</a:t>
-            </a:r>
+              <a:t>2</a:t>
+            </a:r>
+            <a:endParaRPr sz="1200" b="1" i="0" dirty="0">
+              <a:solidFill>
+                <a:srgbClr val="002D72"/>
+              </a:solidFill>
+              <a:latin typeface="Calibri"/>
+            </a:endParaRPr>
           </a:p>
         </p:txBody>
       </p:sp>
@@ -8176,7 +8711,7 @@
         <p:spPr>
           <a:xfrm>
             <a:off x="841248" y="3941063"/>
-            <a:ext cx="10789920" cy="292608"/>
+            <a:ext cx="10789920" cy="276999"/>
           </a:xfrm>
           <a:prstGeom prst="rect">
             <a:avLst/>
@@ -8191,13 +8726,13 @@
           <a:p>
             <a:pPr algn="l"/>
             <a:r>
-              <a:rPr sz="1200" b="1" i="0">
+              <a:rPr sz="1200" b="1" i="0" dirty="0">
                 <a:solidFill>
                   <a:srgbClr val="FFFFFF"/>
                 </a:solidFill>
                 <a:latin typeface="Calibri"/>
               </a:rPr>
-              <a:t>Schedule Tax Strategy Session with CPA</a:t>
+              <a:t>Tax Strategy Session with CPA</a:t>
             </a:r>
           </a:p>
         </p:txBody>
@@ -8226,7 +8761,7 @@
           <a:p>
             <a:pPr algn="l"/>
             <a:r>
-              <a:rPr sz="1000" b="0" i="0">
+              <a:rPr sz="1000" b="0" i="0" dirty="0">
                 <a:solidFill>
                   <a:srgbClr val="A0A0A0"/>
                 </a:solidFill>
@@ -8334,29 +8869,35 @@
         <p:spPr>
           <a:xfrm>
             <a:off x="411480" y="4873752"/>
-            <a:ext cx="320040" cy="365760"/>
-          </a:xfrm>
-          <a:prstGeom prst="rect">
-            <a:avLst/>
-          </a:prstGeom>
-          <a:noFill/>
-        </p:spPr>
-        <p:txBody>
-          <a:bodyPr wrap="square">
-            <a:spAutoFit/>
-          </a:bodyPr>
-          <a:lstStyle/>
-          <a:p>
-            <a:pPr algn="ctr"/>
-            <a:r>
-              <a:rPr sz="1200" b="1" i="0">
+            <a:ext cx="320040" cy="276999"/>
+          </a:xfrm>
+          <a:prstGeom prst="rect">
+            <a:avLst/>
+          </a:prstGeom>
+          <a:noFill/>
+        </p:spPr>
+        <p:txBody>
+          <a:bodyPr wrap="square">
+            <a:spAutoFit/>
+          </a:bodyPr>
+          <a:lstStyle/>
+          <a:p>
+            <a:pPr algn="ctr"/>
+            <a:r>
+              <a:rPr lang="en-US" sz="1200" b="1" i="0" dirty="0">
                 <a:solidFill>
                   <a:srgbClr val="002D72"/>
                 </a:solidFill>
                 <a:latin typeface="Calibri"/>
               </a:rPr>
-              <a:t>03</a:t>
-            </a:r>
+              <a:t>3</a:t>
+            </a:r>
+            <a:endParaRPr sz="1200" b="1" i="0" dirty="0">
+              <a:solidFill>
+                <a:srgbClr val="002D72"/>
+              </a:solidFill>
+              <a:latin typeface="Calibri"/>
+            </a:endParaRPr>
           </a:p>
         </p:txBody>
       </p:sp>
@@ -8369,7 +8910,7 @@
         <p:spPr>
           <a:xfrm>
             <a:off x="841248" y="4764024"/>
-            <a:ext cx="10789920" cy="292608"/>
+            <a:ext cx="10789920" cy="276999"/>
           </a:xfrm>
           <a:prstGeom prst="rect">
             <a:avLst/>
@@ -8384,13 +8925,13 @@
           <a:p>
             <a:pPr algn="l"/>
             <a:r>
-              <a:rPr sz="1200" b="1" i="0">
+              <a:rPr sz="1200" b="1" i="0" dirty="0">
                 <a:solidFill>
                   <a:srgbClr val="FFFFFF"/>
                 </a:solidFill>
                 <a:latin typeface="Calibri"/>
               </a:rPr>
-              <a:t>Authorize Tranche 1 Liquidation ($4.5M)</a:t>
+              <a:t>Tranche 1 Liquidation ($4.5M)</a:t>
             </a:r>
           </a:p>
         </p:txBody>
@@ -8527,29 +9068,35 @@
         <p:spPr>
           <a:xfrm>
             <a:off x="411480" y="5696712"/>
-            <a:ext cx="320040" cy="365760"/>
-          </a:xfrm>
-          <a:prstGeom prst="rect">
-            <a:avLst/>
-          </a:prstGeom>
-          <a:noFill/>
-        </p:spPr>
-        <p:txBody>
-          <a:bodyPr wrap="square">
-            <a:spAutoFit/>
-          </a:bodyPr>
-          <a:lstStyle/>
-          <a:p>
-            <a:pPr algn="ctr"/>
-            <a:r>
-              <a:rPr sz="1200" b="1" i="0">
+            <a:ext cx="320040" cy="276999"/>
+          </a:xfrm>
+          <a:prstGeom prst="rect">
+            <a:avLst/>
+          </a:prstGeom>
+          <a:noFill/>
+        </p:spPr>
+        <p:txBody>
+          <a:bodyPr wrap="square">
+            <a:spAutoFit/>
+          </a:bodyPr>
+          <a:lstStyle/>
+          <a:p>
+            <a:pPr algn="ctr"/>
+            <a:r>
+              <a:rPr lang="en-US" sz="1200" b="1" i="0" dirty="0">
                 <a:solidFill>
                   <a:srgbClr val="002D72"/>
                 </a:solidFill>
                 <a:latin typeface="Calibri"/>
               </a:rPr>
-              <a:t>04</a:t>
-            </a:r>
+              <a:t>4</a:t>
+            </a:r>
+            <a:endParaRPr sz="1200" b="1" i="0" dirty="0">
+              <a:solidFill>
+                <a:srgbClr val="002D72"/>
+              </a:solidFill>
+              <a:latin typeface="Calibri"/>
+            </a:endParaRPr>
           </a:p>
         </p:txBody>
       </p:sp>
@@ -8562,7 +9109,7 @@
         <p:spPr>
           <a:xfrm>
             <a:off x="841248" y="5586984"/>
-            <a:ext cx="10789920" cy="292608"/>
+            <a:ext cx="10789920" cy="276999"/>
           </a:xfrm>
           <a:prstGeom prst="rect">
             <a:avLst/>
@@ -8577,13 +9124,13 @@
           <a:p>
             <a:pPr algn="l"/>
             <a:r>
-              <a:rPr sz="1200" b="1" i="0">
+              <a:rPr sz="1200" b="1" i="0" dirty="0">
                 <a:solidFill>
                   <a:srgbClr val="FFFFFF"/>
                 </a:solidFill>
                 <a:latin typeface="Calibri"/>
               </a:rPr>
-              <a:t>Establish SBL Credit Facility</a:t>
+              <a:t>SBL Credit Facility</a:t>
             </a:r>
           </a:p>
         </p:txBody>
@@ -8676,28 +9223,46 @@
         <p:spPr>
           <a:xfrm>
             <a:off x="365760" y="6419088"/>
-            <a:ext cx="11457432" cy="347472"/>
-          </a:xfrm>
-          <a:prstGeom prst="rect">
-            <a:avLst/>
-          </a:prstGeom>
-          <a:noFill/>
-        </p:spPr>
-        <p:txBody>
-          <a:bodyPr wrap="square">
-            <a:spAutoFit/>
-          </a:bodyPr>
-          <a:lstStyle/>
-          <a:p>
-            <a:pPr algn="ctr"/>
-            <a:r>
-              <a:rPr sz="800" b="0" i="0">
+            <a:ext cx="11457432" cy="215444"/>
+          </a:xfrm>
+          <a:prstGeom prst="rect">
+            <a:avLst/>
+          </a:prstGeom>
+          <a:noFill/>
+        </p:spPr>
+        <p:txBody>
+          <a:bodyPr wrap="square">
+            <a:spAutoFit/>
+          </a:bodyPr>
+          <a:lstStyle/>
+          <a:p>
+            <a:pPr algn="ctr"/>
+            <a:r>
+              <a:rPr sz="800" b="0" i="0" dirty="0">
                 <a:solidFill>
                   <a:srgbClr val="A0A0A0"/>
                 </a:solidFill>
                 <a:latin typeface="Calibri"/>
               </a:rPr>
-              <a:t>For illustrative purposes only. All figures are estimates based on modeled assumptions. Past performance does not guarantee future results. Consult a licensed financial advisor before making investment decisions.  |  February 2026</a:t>
+              <a:t>For illustrative purposes only. All figures are estimates based on modeled assumptions. Past performance does not guarantee future results. </a:t>
+            </a:r>
+            <a:r>
+              <a:rPr lang="en-US" sz="800" b="0" i="0" dirty="0">
+                <a:solidFill>
+                  <a:srgbClr val="A0A0A0"/>
+                </a:solidFill>
+                <a:latin typeface="Calibri"/>
+              </a:rPr>
+              <a:t> </a:t>
+            </a:r>
+            <a:r>
+              <a:rPr sz="800" b="0" i="0" dirty="0">
+                <a:solidFill>
+                  <a:srgbClr val="A0A0A0"/>
+                </a:solidFill>
+                <a:latin typeface="Calibri"/>
+              </a:rPr>
+              <a:t>|  February 2026</a:t>
             </a:r>
           </a:p>
         </p:txBody>
@@ -8735,7 +9300,7 @@
         </p:nvSpPr>
         <p:spPr>
           <a:xfrm>
-            <a:off x="0" y="0"/>
+            <a:off x="0" y="54864"/>
             <a:ext cx="12188952" cy="6858000"/>
           </a:xfrm>
           <a:prstGeom prst="rect">
@@ -9455,29 +10020,35 @@
         <p:spPr>
           <a:xfrm>
             <a:off x="384048" y="1362456"/>
-            <a:ext cx="310896" cy="365760"/>
-          </a:xfrm>
-          <a:prstGeom prst="rect">
-            <a:avLst/>
-          </a:prstGeom>
-          <a:noFill/>
-        </p:spPr>
-        <p:txBody>
-          <a:bodyPr wrap="square">
-            <a:spAutoFit/>
-          </a:bodyPr>
-          <a:lstStyle/>
-          <a:p>
-            <a:pPr algn="ctr"/>
-            <a:r>
-              <a:rPr sz="1300" b="1" i="0">
+            <a:ext cx="310896" cy="292388"/>
+          </a:xfrm>
+          <a:prstGeom prst="rect">
+            <a:avLst/>
+          </a:prstGeom>
+          <a:noFill/>
+        </p:spPr>
+        <p:txBody>
+          <a:bodyPr wrap="square">
+            <a:spAutoFit/>
+          </a:bodyPr>
+          <a:lstStyle/>
+          <a:p>
+            <a:pPr algn="ctr"/>
+            <a:r>
+              <a:rPr lang="en-US" sz="1300" b="1" i="0" dirty="0">
                 <a:solidFill>
                   <a:srgbClr val="C8A84B"/>
                 </a:solidFill>
                 <a:latin typeface="Calibri"/>
               </a:rPr>
-              <a:t>01</a:t>
-            </a:r>
+              <a:t>1</a:t>
+            </a:r>
+            <a:endParaRPr sz="1300" b="1" i="0" dirty="0">
+              <a:solidFill>
+                <a:srgbClr val="C8A84B"/>
+              </a:solidFill>
+              <a:latin typeface="Calibri"/>
+            </a:endParaRPr>
           </a:p>
         </p:txBody>
       </p:sp>
@@ -9648,29 +10219,35 @@
         <p:spPr>
           <a:xfrm>
             <a:off x="384048" y="2093976"/>
-            <a:ext cx="310896" cy="365760"/>
-          </a:xfrm>
-          <a:prstGeom prst="rect">
-            <a:avLst/>
-          </a:prstGeom>
-          <a:noFill/>
-        </p:spPr>
-        <p:txBody>
-          <a:bodyPr wrap="square">
-            <a:spAutoFit/>
-          </a:bodyPr>
-          <a:lstStyle/>
-          <a:p>
-            <a:pPr algn="ctr"/>
-            <a:r>
-              <a:rPr sz="1300" b="1" i="0">
+            <a:ext cx="310896" cy="292388"/>
+          </a:xfrm>
+          <a:prstGeom prst="rect">
+            <a:avLst/>
+          </a:prstGeom>
+          <a:noFill/>
+        </p:spPr>
+        <p:txBody>
+          <a:bodyPr wrap="square">
+            <a:spAutoFit/>
+          </a:bodyPr>
+          <a:lstStyle/>
+          <a:p>
+            <a:pPr algn="ctr"/>
+            <a:r>
+              <a:rPr lang="en-US" sz="1300" b="1" i="0" dirty="0">
                 <a:solidFill>
                   <a:srgbClr val="C8A84B"/>
                 </a:solidFill>
                 <a:latin typeface="Calibri"/>
               </a:rPr>
-              <a:t>02</a:t>
-            </a:r>
+              <a:t>2</a:t>
+            </a:r>
+            <a:endParaRPr sz="1300" b="1" i="0" dirty="0">
+              <a:solidFill>
+                <a:srgbClr val="C8A84B"/>
+              </a:solidFill>
+              <a:latin typeface="Calibri"/>
+            </a:endParaRPr>
           </a:p>
         </p:txBody>
       </p:sp>
@@ -9841,29 +10418,35 @@
         <p:spPr>
           <a:xfrm>
             <a:off x="384048" y="2825496"/>
-            <a:ext cx="310896" cy="365760"/>
-          </a:xfrm>
-          <a:prstGeom prst="rect">
-            <a:avLst/>
-          </a:prstGeom>
-          <a:noFill/>
-        </p:spPr>
-        <p:txBody>
-          <a:bodyPr wrap="square">
-            <a:spAutoFit/>
-          </a:bodyPr>
-          <a:lstStyle/>
-          <a:p>
-            <a:pPr algn="ctr"/>
-            <a:r>
-              <a:rPr sz="1300" b="1" i="0">
+            <a:ext cx="310896" cy="292388"/>
+          </a:xfrm>
+          <a:prstGeom prst="rect">
+            <a:avLst/>
+          </a:prstGeom>
+          <a:noFill/>
+        </p:spPr>
+        <p:txBody>
+          <a:bodyPr wrap="square">
+            <a:spAutoFit/>
+          </a:bodyPr>
+          <a:lstStyle/>
+          <a:p>
+            <a:pPr algn="ctr"/>
+            <a:r>
+              <a:rPr lang="en-US" sz="1300" b="1" i="0" dirty="0">
                 <a:solidFill>
                   <a:srgbClr val="C8A84B"/>
                 </a:solidFill>
                 <a:latin typeface="Calibri"/>
               </a:rPr>
-              <a:t>03</a:t>
-            </a:r>
+              <a:t>3</a:t>
+            </a:r>
+            <a:endParaRPr sz="1300" b="1" i="0" dirty="0">
+              <a:solidFill>
+                <a:srgbClr val="C8A84B"/>
+              </a:solidFill>
+              <a:latin typeface="Calibri"/>
+            </a:endParaRPr>
           </a:p>
         </p:txBody>
       </p:sp>
@@ -9926,7 +10509,7 @@
           <a:p>
             <a:pPr algn="l"/>
             <a:r>
-              <a:rPr sz="1000" b="0" i="0">
+              <a:rPr sz="1000" b="0" i="0" dirty="0">
                 <a:solidFill>
                   <a:srgbClr val="404040"/>
                 </a:solidFill>
@@ -10034,29 +10617,35 @@
         <p:spPr>
           <a:xfrm>
             <a:off x="384048" y="3557016"/>
-            <a:ext cx="310896" cy="365760"/>
-          </a:xfrm>
-          <a:prstGeom prst="rect">
-            <a:avLst/>
-          </a:prstGeom>
-          <a:noFill/>
-        </p:spPr>
-        <p:txBody>
-          <a:bodyPr wrap="square">
-            <a:spAutoFit/>
-          </a:bodyPr>
-          <a:lstStyle/>
-          <a:p>
-            <a:pPr algn="ctr"/>
-            <a:r>
-              <a:rPr sz="1300" b="1" i="0">
+            <a:ext cx="310896" cy="292388"/>
+          </a:xfrm>
+          <a:prstGeom prst="rect">
+            <a:avLst/>
+          </a:prstGeom>
+          <a:noFill/>
+        </p:spPr>
+        <p:txBody>
+          <a:bodyPr wrap="square">
+            <a:spAutoFit/>
+          </a:bodyPr>
+          <a:lstStyle/>
+          <a:p>
+            <a:pPr algn="ctr"/>
+            <a:r>
+              <a:rPr lang="en-US" sz="1300" b="1" i="0" dirty="0">
                 <a:solidFill>
                   <a:srgbClr val="C8A84B"/>
                 </a:solidFill>
                 <a:latin typeface="Calibri"/>
               </a:rPr>
-              <a:t>04</a:t>
-            </a:r>
+              <a:t>4</a:t>
+            </a:r>
+            <a:endParaRPr sz="1300" b="1" i="0" dirty="0">
+              <a:solidFill>
+                <a:srgbClr val="C8A84B"/>
+              </a:solidFill>
+              <a:latin typeface="Calibri"/>
+            </a:endParaRPr>
           </a:p>
         </p:txBody>
       </p:sp>
@@ -10119,7 +10708,7 @@
           <a:p>
             <a:pPr algn="l"/>
             <a:r>
-              <a:rPr sz="1000" b="0" i="0">
+              <a:rPr sz="1000" b="0" i="0" dirty="0">
                 <a:solidFill>
                   <a:srgbClr val="404040"/>
                 </a:solidFill>
@@ -10227,29 +10816,35 @@
         <p:spPr>
           <a:xfrm>
             <a:off x="6327648" y="1362456"/>
-            <a:ext cx="310896" cy="365760"/>
-          </a:xfrm>
-          <a:prstGeom prst="rect">
-            <a:avLst/>
-          </a:prstGeom>
-          <a:noFill/>
-        </p:spPr>
-        <p:txBody>
-          <a:bodyPr wrap="square">
-            <a:spAutoFit/>
-          </a:bodyPr>
-          <a:lstStyle/>
-          <a:p>
-            <a:pPr algn="ctr"/>
-            <a:r>
-              <a:rPr sz="1300" b="1" i="0">
+            <a:ext cx="310896" cy="292388"/>
+          </a:xfrm>
+          <a:prstGeom prst="rect">
+            <a:avLst/>
+          </a:prstGeom>
+          <a:noFill/>
+        </p:spPr>
+        <p:txBody>
+          <a:bodyPr wrap="square">
+            <a:spAutoFit/>
+          </a:bodyPr>
+          <a:lstStyle/>
+          <a:p>
+            <a:pPr algn="ctr"/>
+            <a:r>
+              <a:rPr lang="en-US" sz="1300" b="1" i="0" dirty="0">
                 <a:solidFill>
                   <a:srgbClr val="C8A84B"/>
                 </a:solidFill>
                 <a:latin typeface="Calibri"/>
               </a:rPr>
-              <a:t>05</a:t>
-            </a:r>
+              <a:t>5</a:t>
+            </a:r>
+            <a:endParaRPr sz="1300" b="1" i="0" dirty="0">
+              <a:solidFill>
+                <a:srgbClr val="C8A84B"/>
+              </a:solidFill>
+              <a:latin typeface="Calibri"/>
+            </a:endParaRPr>
           </a:p>
         </p:txBody>
       </p:sp>
@@ -10420,29 +11015,35 @@
         <p:spPr>
           <a:xfrm>
             <a:off x="6327648" y="2093976"/>
-            <a:ext cx="310896" cy="365760"/>
-          </a:xfrm>
-          <a:prstGeom prst="rect">
-            <a:avLst/>
-          </a:prstGeom>
-          <a:noFill/>
-        </p:spPr>
-        <p:txBody>
-          <a:bodyPr wrap="square">
-            <a:spAutoFit/>
-          </a:bodyPr>
-          <a:lstStyle/>
-          <a:p>
-            <a:pPr algn="ctr"/>
-            <a:r>
-              <a:rPr sz="1300" b="1" i="0">
+            <a:ext cx="310896" cy="292388"/>
+          </a:xfrm>
+          <a:prstGeom prst="rect">
+            <a:avLst/>
+          </a:prstGeom>
+          <a:noFill/>
+        </p:spPr>
+        <p:txBody>
+          <a:bodyPr wrap="square">
+            <a:spAutoFit/>
+          </a:bodyPr>
+          <a:lstStyle/>
+          <a:p>
+            <a:pPr algn="ctr"/>
+            <a:r>
+              <a:rPr lang="en-US" sz="1300" b="1" i="0" dirty="0">
                 <a:solidFill>
                   <a:srgbClr val="C8A84B"/>
                 </a:solidFill>
                 <a:latin typeface="Calibri"/>
               </a:rPr>
-              <a:t>06</a:t>
-            </a:r>
+              <a:t>6</a:t>
+            </a:r>
+            <a:endParaRPr sz="1300" b="1" i="0" dirty="0">
+              <a:solidFill>
+                <a:srgbClr val="C8A84B"/>
+              </a:solidFill>
+              <a:latin typeface="Calibri"/>
+            </a:endParaRPr>
           </a:p>
         </p:txBody>
       </p:sp>
@@ -10489,7 +11090,7 @@
         </p:nvSpPr>
         <p:spPr>
           <a:xfrm>
-            <a:off x="6720840" y="2322576"/>
+            <a:off x="6720840" y="2240060"/>
             <a:ext cx="5029200" cy="292608"/>
           </a:xfrm>
           <a:prstGeom prst="rect">
@@ -10505,7 +11106,7 @@
           <a:p>
             <a:pPr algn="l"/>
             <a:r>
-              <a:rPr sz="1000" b="0" i="0">
+              <a:rPr sz="1000" b="0" i="0" dirty="0">
                 <a:solidFill>
                   <a:srgbClr val="404040"/>
                 </a:solidFill>
@@ -10613,29 +11214,35 @@
         <p:spPr>
           <a:xfrm>
             <a:off x="6327648" y="2825496"/>
-            <a:ext cx="310896" cy="365760"/>
-          </a:xfrm>
-          <a:prstGeom prst="rect">
-            <a:avLst/>
-          </a:prstGeom>
-          <a:noFill/>
-        </p:spPr>
-        <p:txBody>
-          <a:bodyPr wrap="square">
-            <a:spAutoFit/>
-          </a:bodyPr>
-          <a:lstStyle/>
-          <a:p>
-            <a:pPr algn="ctr"/>
-            <a:r>
-              <a:rPr sz="1300" b="1" i="0">
+            <a:ext cx="310896" cy="292388"/>
+          </a:xfrm>
+          <a:prstGeom prst="rect">
+            <a:avLst/>
+          </a:prstGeom>
+          <a:noFill/>
+        </p:spPr>
+        <p:txBody>
+          <a:bodyPr wrap="square">
+            <a:spAutoFit/>
+          </a:bodyPr>
+          <a:lstStyle/>
+          <a:p>
+            <a:pPr algn="ctr"/>
+            <a:r>
+              <a:rPr lang="en-US" sz="1300" b="1" i="0" dirty="0">
                 <a:solidFill>
                   <a:srgbClr val="C8A84B"/>
                 </a:solidFill>
                 <a:latin typeface="Calibri"/>
               </a:rPr>
-              <a:t>07</a:t>
-            </a:r>
+              <a:t>7</a:t>
+            </a:r>
+            <a:endParaRPr sz="1300" b="1" i="0" dirty="0">
+              <a:solidFill>
+                <a:srgbClr val="C8A84B"/>
+              </a:solidFill>
+              <a:latin typeface="Calibri"/>
+            </a:endParaRPr>
           </a:p>
         </p:txBody>
       </p:sp>
@@ -10806,29 +11413,35 @@
         <p:spPr>
           <a:xfrm>
             <a:off x="6327648" y="3557016"/>
-            <a:ext cx="310896" cy="365760"/>
-          </a:xfrm>
-          <a:prstGeom prst="rect">
-            <a:avLst/>
-          </a:prstGeom>
-          <a:noFill/>
-        </p:spPr>
-        <p:txBody>
-          <a:bodyPr wrap="square">
-            <a:spAutoFit/>
-          </a:bodyPr>
-          <a:lstStyle/>
-          <a:p>
-            <a:pPr algn="ctr"/>
-            <a:r>
-              <a:rPr sz="1300" b="1" i="0">
+            <a:ext cx="310896" cy="292388"/>
+          </a:xfrm>
+          <a:prstGeom prst="rect">
+            <a:avLst/>
+          </a:prstGeom>
+          <a:noFill/>
+        </p:spPr>
+        <p:txBody>
+          <a:bodyPr wrap="square">
+            <a:spAutoFit/>
+          </a:bodyPr>
+          <a:lstStyle/>
+          <a:p>
+            <a:pPr algn="ctr"/>
+            <a:r>
+              <a:rPr lang="en-US" sz="1300" b="1" i="0" dirty="0">
                 <a:solidFill>
                   <a:srgbClr val="C8A84B"/>
                 </a:solidFill>
                 <a:latin typeface="Calibri"/>
               </a:rPr>
-              <a:t>08</a:t>
-            </a:r>
+              <a:t>8</a:t>
+            </a:r>
+            <a:endParaRPr sz="1300" b="1" i="0" dirty="0">
+              <a:solidFill>
+                <a:srgbClr val="C8A84B"/>
+              </a:solidFill>
+              <a:latin typeface="Calibri"/>
+            </a:endParaRPr>
           </a:p>
         </p:txBody>
       </p:sp>
@@ -11567,7 +12180,7 @@
         <p:spPr>
           <a:xfrm>
             <a:off x="365760" y="1234440"/>
-            <a:ext cx="5394960" cy="5074920"/>
+            <a:ext cx="5394960" cy="5166360"/>
           </a:xfrm>
           <a:prstGeom prst="rect">
             <a:avLst/>
@@ -11883,7 +12496,7 @@
         <p:spPr>
           <a:xfrm>
             <a:off x="594360" y="2990087"/>
-            <a:ext cx="5074920" cy="438912"/>
+            <a:ext cx="5074920" cy="400110"/>
           </a:xfrm>
           <a:prstGeom prst="rect">
             <a:avLst/>
@@ -11898,13 +12511,40 @@
           <a:p>
             <a:pPr algn="l"/>
             <a:r>
-              <a:rPr sz="1000" b="0" i="0">
+              <a:rPr sz="1000" b="0" i="0" dirty="0">
                 <a:solidFill>
                   <a:srgbClr val="404040"/>
                 </a:solidFill>
                 <a:latin typeface="Calibri"/>
               </a:rPr>
-              <a:t>The position cannot be unwound without a significant tax event. Inaction is not neutral — it compounds the concentration problem.</a:t>
+              <a:t>The position cannot be unwound without a significant tax event. Inaction is not neutral</a:t>
+            </a:r>
+            <a:r>
+              <a:rPr lang="en-US" sz="1000" b="0" i="0" dirty="0">
+                <a:solidFill>
+                  <a:srgbClr val="404040"/>
+                </a:solidFill>
+                <a:latin typeface="Calibri"/>
+              </a:rPr>
+              <a:t>,</a:t>
+            </a:r>
+            <a:r>
+              <a:rPr lang="en-US" sz="1000" dirty="0">
+                <a:solidFill>
+                  <a:srgbClr val="404040"/>
+                </a:solidFill>
+                <a:latin typeface="Calibri"/>
+              </a:rPr>
+              <a:t> as</a:t>
+            </a:r>
+            <a:r>
+              <a:rPr sz="1000" b="0" i="0" dirty="0">
+                <a:solidFill>
+                  <a:srgbClr val="404040"/>
+                </a:solidFill>
+                <a:latin typeface="Calibri"/>
+              </a:rPr>
+              <a:t> it compounds the concentration problem.</a:t>
             </a:r>
           </a:p>
         </p:txBody>
@@ -12012,7 +12652,7 @@
           <a:p>
             <a:pPr algn="l"/>
             <a:r>
-              <a:rPr sz="1000" b="0" i="0">
+              <a:rPr sz="1000" b="0" i="0" dirty="0">
                 <a:solidFill>
                   <a:srgbClr val="404040"/>
                 </a:solidFill>
@@ -12260,7 +12900,7 @@
         <p:spPr>
           <a:xfrm>
             <a:off x="6035040" y="1234440"/>
-            <a:ext cx="5760720" cy="5074920"/>
+            <a:ext cx="5760720" cy="5166360"/>
           </a:xfrm>
           <a:prstGeom prst="rect">
             <a:avLst/>
@@ -12338,7 +12978,7 @@
         </p:nvSpPr>
         <p:spPr>
           <a:xfrm>
-            <a:off x="6126480" y="1801368"/>
+            <a:off x="6121492" y="1700784"/>
             <a:ext cx="5577840" cy="713232"/>
           </a:xfrm>
           <a:prstGeom prst="rect">
@@ -12382,7 +13022,7 @@
         </p:nvSpPr>
         <p:spPr>
           <a:xfrm>
-            <a:off x="6263640" y="1847088"/>
+            <a:off x="6258652" y="1746504"/>
             <a:ext cx="2743200" cy="274320"/>
           </a:xfrm>
           <a:prstGeom prst="rect">
@@ -12417,7 +13057,7 @@
         </p:nvSpPr>
         <p:spPr>
           <a:xfrm>
-            <a:off x="9052560" y="1828800"/>
+            <a:off x="9047572" y="1728216"/>
             <a:ext cx="2560320" cy="347472"/>
           </a:xfrm>
           <a:prstGeom prst="rect">
@@ -12452,7 +13092,7 @@
         </p:nvSpPr>
         <p:spPr>
           <a:xfrm>
-            <a:off x="6263640" y="2240280"/>
+            <a:off x="6258652" y="2139696"/>
             <a:ext cx="5303520" cy="237744"/>
           </a:xfrm>
           <a:prstGeom prst="rect">
@@ -12487,7 +13127,7 @@
         </p:nvSpPr>
         <p:spPr>
           <a:xfrm>
-            <a:off x="6126480" y="2587752"/>
+            <a:off x="6121492" y="2487168"/>
             <a:ext cx="5577840" cy="713232"/>
           </a:xfrm>
           <a:prstGeom prst="rect">
@@ -12531,7 +13171,7 @@
         </p:nvSpPr>
         <p:spPr>
           <a:xfrm>
-            <a:off x="6263640" y="2633472"/>
+            <a:off x="6258652" y="2532888"/>
             <a:ext cx="2743200" cy="274320"/>
           </a:xfrm>
           <a:prstGeom prst="rect">
@@ -12566,7 +13206,7 @@
         </p:nvSpPr>
         <p:spPr>
           <a:xfrm>
-            <a:off x="9052560" y="2615184"/>
+            <a:off x="9047572" y="2514600"/>
             <a:ext cx="2560320" cy="347472"/>
           </a:xfrm>
           <a:prstGeom prst="rect">
@@ -12601,7 +13241,7 @@
         </p:nvSpPr>
         <p:spPr>
           <a:xfrm>
-            <a:off x="6263640" y="3026664"/>
+            <a:off x="6258652" y="2926080"/>
             <a:ext cx="5303520" cy="237744"/>
           </a:xfrm>
           <a:prstGeom prst="rect">
@@ -12636,7 +13276,7 @@
         </p:nvSpPr>
         <p:spPr>
           <a:xfrm>
-            <a:off x="6126480" y="3374136"/>
+            <a:off x="6121492" y="3273552"/>
             <a:ext cx="5577840" cy="713232"/>
           </a:xfrm>
           <a:prstGeom prst="rect">
@@ -12680,7 +13320,7 @@
         </p:nvSpPr>
         <p:spPr>
           <a:xfrm>
-            <a:off x="6263640" y="3419856"/>
+            <a:off x="6258652" y="3319272"/>
             <a:ext cx="2743200" cy="274320"/>
           </a:xfrm>
           <a:prstGeom prst="rect">
@@ -12715,7 +13355,7 @@
         </p:nvSpPr>
         <p:spPr>
           <a:xfrm>
-            <a:off x="9052560" y="3401568"/>
+            <a:off x="9047572" y="3300984"/>
             <a:ext cx="2560320" cy="347472"/>
           </a:xfrm>
           <a:prstGeom prst="rect">
@@ -12750,7 +13390,7 @@
         </p:nvSpPr>
         <p:spPr>
           <a:xfrm>
-            <a:off x="6263640" y="3813048"/>
+            <a:off x="6258652" y="3712464"/>
             <a:ext cx="5303520" cy="237744"/>
           </a:xfrm>
           <a:prstGeom prst="rect">
@@ -12785,7 +13425,7 @@
         </p:nvSpPr>
         <p:spPr>
           <a:xfrm>
-            <a:off x="6126480" y="4160520"/>
+            <a:off x="6121492" y="4059936"/>
             <a:ext cx="5577840" cy="713232"/>
           </a:xfrm>
           <a:prstGeom prst="rect">
@@ -12829,7 +13469,7 @@
         </p:nvSpPr>
         <p:spPr>
           <a:xfrm>
-            <a:off x="6263640" y="4206240"/>
+            <a:off x="6258652" y="4105656"/>
             <a:ext cx="2743200" cy="274320"/>
           </a:xfrm>
           <a:prstGeom prst="rect">
@@ -12864,7 +13504,7 @@
         </p:nvSpPr>
         <p:spPr>
           <a:xfrm>
-            <a:off x="9052560" y="4187952"/>
+            <a:off x="9047572" y="4087368"/>
             <a:ext cx="2560320" cy="347472"/>
           </a:xfrm>
           <a:prstGeom prst="rect">
@@ -12899,7 +13539,7 @@
         </p:nvSpPr>
         <p:spPr>
           <a:xfrm>
-            <a:off x="6263640" y="4599431"/>
+            <a:off x="6258652" y="4498847"/>
             <a:ext cx="5303520" cy="237744"/>
           </a:xfrm>
           <a:prstGeom prst="rect">
@@ -12934,7 +13574,7 @@
         </p:nvSpPr>
         <p:spPr>
           <a:xfrm>
-            <a:off x="6126480" y="4946904"/>
+            <a:off x="6121492" y="4846320"/>
             <a:ext cx="5577840" cy="713232"/>
           </a:xfrm>
           <a:prstGeom prst="rect">
@@ -12978,7 +13618,7 @@
         </p:nvSpPr>
         <p:spPr>
           <a:xfrm>
-            <a:off x="6263640" y="4992624"/>
+            <a:off x="6258652" y="4892040"/>
             <a:ext cx="2743200" cy="274320"/>
           </a:xfrm>
           <a:prstGeom prst="rect">
@@ -13013,7 +13653,7 @@
         </p:nvSpPr>
         <p:spPr>
           <a:xfrm>
-            <a:off x="9052560" y="4974336"/>
+            <a:off x="9047572" y="4873752"/>
             <a:ext cx="2560320" cy="347472"/>
           </a:xfrm>
           <a:prstGeom prst="rect">
@@ -13048,7 +13688,7 @@
         </p:nvSpPr>
         <p:spPr>
           <a:xfrm>
-            <a:off x="6263640" y="5385816"/>
+            <a:off x="6258652" y="5285232"/>
             <a:ext cx="5303520" cy="237744"/>
           </a:xfrm>
           <a:prstGeom prst="rect">
@@ -13083,7 +13723,7 @@
         </p:nvSpPr>
         <p:spPr>
           <a:xfrm>
-            <a:off x="6126480" y="5733288"/>
+            <a:off x="6121492" y="5632704"/>
             <a:ext cx="5577840" cy="713232"/>
           </a:xfrm>
           <a:prstGeom prst="rect">
@@ -13127,7 +13767,7 @@
         </p:nvSpPr>
         <p:spPr>
           <a:xfrm>
-            <a:off x="6263640" y="5779008"/>
+            <a:off x="6258652" y="5678424"/>
             <a:ext cx="2743200" cy="274320"/>
           </a:xfrm>
           <a:prstGeom prst="rect">
@@ -13162,7 +13802,7 @@
         </p:nvSpPr>
         <p:spPr>
           <a:xfrm>
-            <a:off x="9052560" y="5760720"/>
+            <a:off x="9047572" y="5660136"/>
             <a:ext cx="2560320" cy="347472"/>
           </a:xfrm>
           <a:prstGeom prst="rect">
@@ -13197,7 +13837,7 @@
         </p:nvSpPr>
         <p:spPr>
           <a:xfrm>
-            <a:off x="6263640" y="6172200"/>
+            <a:off x="6258652" y="6071616"/>
             <a:ext cx="5303520" cy="237744"/>
           </a:xfrm>
           <a:prstGeom prst="rect">
@@ -16274,7 +16914,7 @@
         <p:spPr>
           <a:xfrm>
             <a:off x="548640" y="4023360"/>
-            <a:ext cx="11155680" cy="457200"/>
+            <a:ext cx="11155680" cy="430887"/>
           </a:xfrm>
           <a:prstGeom prst="rect">
             <a:avLst/>
@@ -16289,13 +16929,49 @@
           <a:p>
             <a:pPr algn="l"/>
             <a:r>
-              <a:rPr sz="1100" b="0" i="0">
+              <a:rPr sz="1100" b="0" i="0" dirty="0">
                 <a:solidFill>
                   <a:srgbClr val="FFFFFF"/>
                 </a:solidFill>
                 <a:latin typeface="Calibri"/>
               </a:rPr>
-              <a:t>The current portfolio takes on 53% more market risk than the optimized model while generating 82% less annual income. This is not a trade-off — it is an inefficiency. Diversification does not sacrifice return; it improves the quality of each unit of risk taken.</a:t>
+              <a:t>The current portfolio takes on 53% more market risk than the optimized model while generating 82% less annual income. This is not a trade-off</a:t>
+            </a:r>
+            <a:r>
+              <a:rPr lang="en-US" sz="1100" dirty="0">
+                <a:solidFill>
+                  <a:srgbClr val="FFFFFF"/>
+                </a:solidFill>
+                <a:latin typeface="Calibri"/>
+              </a:rPr>
+              <a:t>; </a:t>
+            </a:r>
+            <a:r>
+              <a:rPr sz="1100" b="0" i="0" dirty="0">
+                <a:solidFill>
+                  <a:srgbClr val="FFFFFF"/>
+                </a:solidFill>
+                <a:latin typeface="Calibri"/>
+              </a:rPr>
+              <a:t>it is an inefficiency. Diversification does not sacrifice return</a:t>
+            </a:r>
+            <a:r>
+              <a:rPr lang="en-US" sz="1100" b="0" i="0" dirty="0">
+                <a:solidFill>
+                  <a:srgbClr val="FFFFFF"/>
+                </a:solidFill>
+                <a:latin typeface="Calibri"/>
+              </a:rPr>
+              <a:t> as</a:t>
+            </a:r>
+            <a:r>
+              <a:rPr sz="1100" b="0" i="0" dirty="0">
+                <a:solidFill>
+                  <a:srgbClr val="FFFFFF"/>
+                </a:solidFill>
+                <a:latin typeface="Calibri"/>
+              </a:rPr>
+              <a:t> it improves the quality of each unit of risk taken.</a:t>
             </a:r>
           </a:p>
         </p:txBody>
@@ -19715,7 +20391,7 @@
           <a:p>
             <a:pPr algn="l"/>
             <a:r>
-              <a:rPr sz="1400" b="0" i="0">
+              <a:rPr sz="1400" b="0" i="0" dirty="0">
                 <a:solidFill>
                   <a:srgbClr val="C8A84B"/>
                 </a:solidFill>
@@ -20933,7 +21609,7 @@
         </p:nvSpPr>
         <p:spPr>
           <a:xfrm>
-            <a:off x="365760" y="2633472"/>
+            <a:off x="365760" y="2679193"/>
             <a:ext cx="5394960" cy="292608"/>
           </a:xfrm>
           <a:prstGeom prst="rect">
@@ -21082,7 +21758,7 @@
         </p:nvSpPr>
         <p:spPr>
           <a:xfrm>
-            <a:off x="365760" y="2926079"/>
+            <a:off x="365760" y="2971800"/>
             <a:ext cx="5394960" cy="384048"/>
           </a:xfrm>
           <a:prstGeom prst="rect">
@@ -21231,7 +21907,7 @@
         </p:nvSpPr>
         <p:spPr>
           <a:xfrm>
-            <a:off x="365760" y="3328415"/>
+            <a:off x="365760" y="3374136"/>
             <a:ext cx="5394960" cy="384048"/>
           </a:xfrm>
           <a:prstGeom prst="rect">
@@ -21380,7 +22056,7 @@
         </p:nvSpPr>
         <p:spPr>
           <a:xfrm>
-            <a:off x="365760" y="3730752"/>
+            <a:off x="365760" y="3776473"/>
             <a:ext cx="5394960" cy="384048"/>
           </a:xfrm>
           <a:prstGeom prst="rect">
@@ -21505,7 +22181,7 @@
         </p:nvSpPr>
         <p:spPr>
           <a:xfrm>
-            <a:off x="365760" y="4133087"/>
+            <a:off x="365760" y="4178808"/>
             <a:ext cx="5394960" cy="384048"/>
           </a:xfrm>
           <a:prstGeom prst="rect">
@@ -21635,7 +22311,7 @@
           <a:p>
             <a:pPr algn="r"/>
             <a:r>
-              <a:rPr sz="1000" b="1" i="0">
+              <a:rPr sz="1000" b="1" i="0" dirty="0">
                 <a:solidFill>
                   <a:srgbClr val="FFFFFF"/>
                 </a:solidFill>
@@ -21654,7 +22330,7 @@
         </p:nvSpPr>
         <p:spPr>
           <a:xfrm>
-            <a:off x="6035040" y="2633472"/>
+            <a:off x="6035040" y="2670048"/>
             <a:ext cx="5760720" cy="292608"/>
           </a:xfrm>
           <a:prstGeom prst="rect">
@@ -21803,7 +22479,7 @@
         </p:nvSpPr>
         <p:spPr>
           <a:xfrm>
-            <a:off x="6035040" y="2926079"/>
+            <a:off x="6035040" y="2962655"/>
             <a:ext cx="5760720" cy="329184"/>
           </a:xfrm>
           <a:prstGeom prst="rect">
@@ -21952,7 +22628,7 @@
         </p:nvSpPr>
         <p:spPr>
           <a:xfrm>
-            <a:off x="6035040" y="3273551"/>
+            <a:off x="6035040" y="3310127"/>
             <a:ext cx="5760720" cy="329184"/>
           </a:xfrm>
           <a:prstGeom prst="rect">
@@ -22101,7 +22777,7 @@
         </p:nvSpPr>
         <p:spPr>
           <a:xfrm>
-            <a:off x="6035040" y="3621024"/>
+            <a:off x="6035040" y="3657600"/>
             <a:ext cx="5760720" cy="329184"/>
           </a:xfrm>
           <a:prstGeom prst="rect">
@@ -22250,7 +22926,7 @@
         </p:nvSpPr>
         <p:spPr>
           <a:xfrm>
-            <a:off x="6035040" y="3968496"/>
+            <a:off x="6035040" y="4005072"/>
             <a:ext cx="5760720" cy="329184"/>
           </a:xfrm>
           <a:prstGeom prst="rect">
@@ -22399,7 +23075,7 @@
         </p:nvSpPr>
         <p:spPr>
           <a:xfrm>
-            <a:off x="6035040" y="4315968"/>
+            <a:off x="6035040" y="4352544"/>
             <a:ext cx="5760720" cy="329184"/>
           </a:xfrm>
           <a:prstGeom prst="rect">
@@ -22548,7 +23224,7 @@
         </p:nvSpPr>
         <p:spPr>
           <a:xfrm>
-            <a:off x="6035040" y="4663440"/>
+            <a:off x="6035040" y="4700016"/>
             <a:ext cx="5760720" cy="329184"/>
           </a:xfrm>
           <a:prstGeom prst="rect">
@@ -22697,7 +23373,7 @@
         </p:nvSpPr>
         <p:spPr>
           <a:xfrm>
-            <a:off x="6035040" y="5010912"/>
+            <a:off x="6035040" y="5047488"/>
             <a:ext cx="5760720" cy="329184"/>
           </a:xfrm>
           <a:prstGeom prst="rect">
@@ -22846,7 +23522,7 @@
         </p:nvSpPr>
         <p:spPr>
           <a:xfrm>
-            <a:off x="6035040" y="5358383"/>
+            <a:off x="6035040" y="5394959"/>
             <a:ext cx="5760720" cy="329184"/>
           </a:xfrm>
           <a:prstGeom prst="rect">
@@ -22995,7 +23671,7 @@
         </p:nvSpPr>
         <p:spPr>
           <a:xfrm>
-            <a:off x="6035040" y="5705856"/>
+            <a:off x="6035040" y="5742432"/>
             <a:ext cx="5760720" cy="329184"/>
           </a:xfrm>
           <a:prstGeom prst="rect">
@@ -23337,7 +24013,7 @@
         <p:spPr>
           <a:xfrm>
             <a:off x="365760" y="640080"/>
-            <a:ext cx="11430000" cy="329184"/>
+            <a:ext cx="11430000" cy="307777"/>
           </a:xfrm>
           <a:prstGeom prst="rect">
             <a:avLst/>
@@ -23352,13 +24028,31 @@
           <a:p>
             <a:pPr algn="l"/>
             <a:r>
-              <a:rPr sz="1400" b="0" i="0">
+              <a:rPr sz="1400" b="0" i="0" dirty="0">
                 <a:solidFill>
                   <a:srgbClr val="C8A84B"/>
                 </a:solidFill>
                 <a:latin typeface="Calibri"/>
               </a:rPr>
-              <a:t>The $6.86M question — and five ways to reduce it.</a:t>
+              <a:t>The $6.86M question</a:t>
+            </a:r>
+            <a:r>
+              <a:rPr lang="en-US" sz="1400" dirty="0">
+                <a:solidFill>
+                  <a:srgbClr val="C8A84B"/>
+                </a:solidFill>
+                <a:latin typeface="Calibri"/>
+              </a:rPr>
+              <a:t> </a:t>
+            </a:r>
+            <a:r>
+              <a:rPr sz="1400" b="0" i="0" dirty="0">
+                <a:solidFill>
+                  <a:srgbClr val="C8A84B"/>
+                </a:solidFill>
+                <a:latin typeface="Calibri"/>
+              </a:rPr>
+              <a:t>and five ways to reduce it.</a:t>
             </a:r>
           </a:p>
         </p:txBody>
@@ -25196,7 +25890,7 @@
           <a:lstStyle/>
           <a:p>
             <a:pPr algn="ctr"/>
-            <a:endParaRPr/>
+            <a:endParaRPr dirty="0"/>
           </a:p>
         </p:txBody>
       </p:sp>
@@ -26576,7 +27270,7 @@
         <p:spPr>
           <a:xfrm>
             <a:off x="548640" y="1508760"/>
-            <a:ext cx="11155680" cy="347472"/>
+            <a:ext cx="11155680" cy="430887"/>
           </a:xfrm>
           <a:prstGeom prst="rect">
             <a:avLst/>
@@ -26591,13 +27285,31 @@
           <a:p>
             <a:pPr algn="l"/>
             <a:r>
-              <a:rPr sz="1100" b="0" i="0">
+              <a:rPr sz="1100" b="0" i="0" dirty="0">
                 <a:solidFill>
                   <a:srgbClr val="FFFFFF"/>
                 </a:solidFill>
                 <a:latin typeface="Calibri"/>
               </a:rPr>
-              <a:t>The tax cost of liquidating $5M of tech stock to fund the foundation: $1,669,500. The annual after-tax cost of a $5M SBL credit facility at 6.50%: $204,750. Over 10 years, the credit strategy outperforms liquidation by $7,124,500 — keeping $5M compounding in the portfolio while the foundation receives full seed capital.</a:t>
+              <a:t>The tax cost of liquidating $5M of tech stock to fund the foundation: $1,669,500. The annual after-tax cost of a $5M SBL credit facility at 6.50%: $204,750. Over 10 years, the credit strategy outperforms liquidation by $7,124,500</a:t>
+            </a:r>
+            <a:r>
+              <a:rPr lang="en-US" sz="1100" dirty="0">
+                <a:solidFill>
+                  <a:srgbClr val="FFFFFF"/>
+                </a:solidFill>
+                <a:latin typeface="Calibri"/>
+              </a:rPr>
+              <a:t> by k</a:t>
+            </a:r>
+            <a:r>
+              <a:rPr sz="1100" b="0" i="0" dirty="0">
+                <a:solidFill>
+                  <a:srgbClr val="FFFFFF"/>
+                </a:solidFill>
+                <a:latin typeface="Calibri"/>
+              </a:rPr>
+              <a:t>eeping $5M compounding in the portfolio while the foundation receives full seed capital.</a:t>
             </a:r>
           </a:p>
         </p:txBody>
@@ -31177,7 +31889,7 @@
         </p:nvSpPr>
         <p:spPr>
           <a:xfrm>
-            <a:off x="11247120" y="2606039"/>
+            <a:off x="11018520" y="2560320"/>
             <a:ext cx="896112" cy="256032"/>
           </a:xfrm>
           <a:prstGeom prst="rect">
@@ -31193,7 +31905,7 @@
           <a:p>
             <a:pPr algn="l"/>
             <a:r>
-              <a:rPr sz="900" b="0" i="0">
+              <a:rPr sz="900" b="0" i="0" dirty="0">
                 <a:solidFill>
                   <a:srgbClr val="7030A0"/>
                 </a:solidFill>
@@ -31650,7 +32362,7 @@
         </p:nvSpPr>
         <p:spPr>
           <a:xfrm>
-            <a:off x="11247120" y="3374135"/>
+            <a:off x="11018520" y="3328416"/>
             <a:ext cx="896112" cy="256032"/>
           </a:xfrm>
           <a:prstGeom prst="rect">
@@ -31666,7 +32378,7 @@
           <a:p>
             <a:pPr algn="l"/>
             <a:r>
-              <a:rPr sz="900" b="0" i="0">
+              <a:rPr sz="900" b="0" i="0" dirty="0">
                 <a:solidFill>
                   <a:srgbClr val="7030A0"/>
                 </a:solidFill>
@@ -31904,7 +32616,7 @@
         </p:nvSpPr>
         <p:spPr>
           <a:xfrm>
-            <a:off x="11247120" y="3758183"/>
+            <a:off x="11018520" y="3712464"/>
             <a:ext cx="896112" cy="256032"/>
           </a:xfrm>
           <a:prstGeom prst="rect">
@@ -31920,7 +32632,7 @@
           <a:p>
             <a:pPr algn="l"/>
             <a:r>
-              <a:rPr sz="900" b="0" i="0">
+              <a:rPr sz="900" b="0" i="0" dirty="0">
                 <a:solidFill>
                   <a:srgbClr val="7030A0"/>
                 </a:solidFill>
@@ -32158,7 +32870,7 @@
         </p:nvSpPr>
         <p:spPr>
           <a:xfrm>
-            <a:off x="11247120" y="4142231"/>
+            <a:off x="11018520" y="4096512"/>
             <a:ext cx="896112" cy="256032"/>
           </a:xfrm>
           <a:prstGeom prst="rect">
@@ -32174,7 +32886,7 @@
           <a:p>
             <a:pPr algn="l"/>
             <a:r>
-              <a:rPr sz="900" b="0" i="0">
+              <a:rPr sz="900" b="0" i="0" dirty="0">
                 <a:solidFill>
                   <a:srgbClr val="7030A0"/>
                 </a:solidFill>
@@ -32631,7 +33343,7 @@
         </p:nvSpPr>
         <p:spPr>
           <a:xfrm>
-            <a:off x="11247120" y="4910327"/>
+            <a:off x="11018520" y="4864608"/>
             <a:ext cx="896112" cy="256032"/>
           </a:xfrm>
           <a:prstGeom prst="rect">
@@ -32647,7 +33359,7 @@
           <a:p>
             <a:pPr algn="l"/>
             <a:r>
-              <a:rPr sz="900" b="0" i="0">
+              <a:rPr sz="900" b="0" i="0" dirty="0">
                 <a:solidFill>
                   <a:srgbClr val="7030A0"/>
                 </a:solidFill>
@@ -32805,7 +33517,7 @@
           <a:p>
             <a:pPr algn="l"/>
             <a:r>
-              <a:rPr sz="1000" b="0" i="0">
+              <a:rPr sz="1000" b="0" i="0" dirty="0">
                 <a:solidFill>
                   <a:srgbClr val="FFFFFF"/>
                 </a:solidFill>
@@ -33142,4 +33854,319 @@
   </a:objectDefaults>
   <a:extraClrSchemeLst/>
 </a:theme>
+</file>
+
+<file path=ppt/theme/theme2.xml><?xml version="1.0" encoding="utf-8"?>
+<a:theme xmlns:a="http://schemas.openxmlformats.org/drawingml/2006/main" name="Office Theme">
+  <a:themeElements>
+    <a:clrScheme name="Office">
+      <a:dk1>
+        <a:sysClr val="windowText" lastClr="000000"/>
+      </a:dk1>
+      <a:lt1>
+        <a:sysClr val="window" lastClr="FFFFFF"/>
+      </a:lt1>
+      <a:dk2>
+        <a:srgbClr val="0E2841"/>
+      </a:dk2>
+      <a:lt2>
+        <a:srgbClr val="E8E8E8"/>
+      </a:lt2>
+      <a:accent1>
+        <a:srgbClr val="156082"/>
+      </a:accent1>
+      <a:accent2>
+        <a:srgbClr val="E97132"/>
+      </a:accent2>
+      <a:accent3>
+        <a:srgbClr val="196B24"/>
+      </a:accent3>
+      <a:accent4>
+        <a:srgbClr val="0F9ED5"/>
+      </a:accent4>
+      <a:accent5>
+        <a:srgbClr val="A02B93"/>
+      </a:accent5>
+      <a:accent6>
+        <a:srgbClr val="4EA72E"/>
+      </a:accent6>
+      <a:hlink>
+        <a:srgbClr val="467886"/>
+      </a:hlink>
+      <a:folHlink>
+        <a:srgbClr val="96607D"/>
+      </a:folHlink>
+    </a:clrScheme>
+    <a:fontScheme name="Office">
+      <a:majorFont>
+        <a:latin typeface="Aptos Display" panose="02110004020202020204"/>
+        <a:ea typeface=""/>
+        <a:cs typeface=""/>
+        <a:font script="Jpan" typeface="游ゴシック Light"/>
+        <a:font script="Hang" typeface="맑은 고딕"/>
+        <a:font script="Hans" typeface="等线 Light"/>
+        <a:font script="Hant" typeface="新細明體"/>
+        <a:font script="Arab" typeface="Times New Roman"/>
+        <a:font script="Hebr" typeface="Times New Roman"/>
+        <a:font script="Thai" typeface="Angsana New"/>
+        <a:font script="Ethi" typeface="Nyala"/>
+        <a:font script="Beng" typeface="Vrinda"/>
+        <a:font script="Gujr" typeface="Shruti"/>
+        <a:font script="Khmr" typeface="MoolBoran"/>
+        <a:font script="Knda" typeface="Tunga"/>
+        <a:font script="Guru" typeface="Raavi"/>
+        <a:font script="Cans" typeface="Euphemia"/>
+        <a:font script="Cher" typeface="Plantagenet Cherokee"/>
+        <a:font script="Yiii" typeface="Microsoft Yi Baiti"/>
+        <a:font script="Tibt" typeface="Microsoft Himalaya"/>
+        <a:font script="Thaa" typeface="MV Boli"/>
+        <a:font script="Deva" typeface="Mangal"/>
+        <a:font script="Telu" typeface="Gautami"/>
+        <a:font script="Taml" typeface="Latha"/>
+        <a:font script="Syrc" typeface="Estrangelo Edessa"/>
+        <a:font script="Orya" typeface="Kalinga"/>
+        <a:font script="Mlym" typeface="Kartika"/>
+        <a:font script="Laoo" typeface="DokChampa"/>
+        <a:font script="Sinh" typeface="Iskoola Pota"/>
+        <a:font script="Mong" typeface="Mongolian Baiti"/>
+        <a:font script="Viet" typeface="Times New Roman"/>
+        <a:font script="Uigh" typeface="Microsoft Uighur"/>
+        <a:font script="Geor" typeface="Sylfaen"/>
+        <a:font script="Armn" typeface="Arial"/>
+        <a:font script="Bugi" typeface="Leelawadee UI"/>
+        <a:font script="Bopo" typeface="Microsoft JhengHei"/>
+        <a:font script="Java" typeface="Javanese Text"/>
+        <a:font script="Lisu" typeface="Segoe UI"/>
+        <a:font script="Mymr" typeface="Myanmar Text"/>
+        <a:font script="Nkoo" typeface="Ebrima"/>
+        <a:font script="Olck" typeface="Nirmala UI"/>
+        <a:font script="Osma" typeface="Ebrima"/>
+        <a:font script="Phag" typeface="Phagspa"/>
+        <a:font script="Syrn" typeface="Estrangelo Edessa"/>
+        <a:font script="Syrj" typeface="Estrangelo Edessa"/>
+        <a:font script="Syre" typeface="Estrangelo Edessa"/>
+        <a:font script="Sora" typeface="Nirmala UI"/>
+        <a:font script="Tale" typeface="Microsoft Tai Le"/>
+        <a:font script="Talu" typeface="Microsoft New Tai Lue"/>
+        <a:font script="Tfng" typeface="Ebrima"/>
+      </a:majorFont>
+      <a:minorFont>
+        <a:latin typeface="Aptos" panose="02110004020202020204"/>
+        <a:ea typeface=""/>
+        <a:cs typeface=""/>
+        <a:font script="Jpan" typeface="游ゴシック"/>
+        <a:font script="Hang" typeface="맑은 고딕"/>
+        <a:font script="Hans" typeface="等线"/>
+        <a:font script="Hant" typeface="新細明體"/>
+        <a:font script="Arab" typeface="Arial"/>
+        <a:font script="Hebr" typeface="Arial"/>
+        <a:font script="Thai" typeface="Cordia New"/>
+        <a:font script="Ethi" typeface="Nyala"/>
+        <a:font script="Beng" typeface="Vrinda"/>
+        <a:font script="Gujr" typeface="Shruti"/>
+        <a:font script="Khmr" typeface="DaunPenh"/>
+        <a:font script="Knda" typeface="Tunga"/>
+        <a:font script="Guru" typeface="Raavi"/>
+        <a:font script="Cans" typeface="Euphemia"/>
+        <a:font script="Cher" typeface="Plantagenet Cherokee"/>
+        <a:font script="Yiii" typeface="Microsoft Yi Baiti"/>
+        <a:font script="Tibt" typeface="Microsoft Himalaya"/>
+        <a:font script="Thaa" typeface="MV Boli"/>
+        <a:font script="Deva" typeface="Mangal"/>
+        <a:font script="Telu" typeface="Gautami"/>
+        <a:font script="Taml" typeface="Latha"/>
+        <a:font script="Syrc" typeface="Estrangelo Edessa"/>
+        <a:font script="Orya" typeface="Kalinga"/>
+        <a:font script="Mlym" typeface="Kartika"/>
+        <a:font script="Laoo" typeface="DokChampa"/>
+        <a:font script="Sinh" typeface="Iskoola Pota"/>
+        <a:font script="Mong" typeface="Mongolian Baiti"/>
+        <a:font script="Viet" typeface="Arial"/>
+        <a:font script="Uigh" typeface="Microsoft Uighur"/>
+        <a:font script="Geor" typeface="Sylfaen"/>
+        <a:font script="Armn" typeface="Arial"/>
+        <a:font script="Bugi" typeface="Leelawadee UI"/>
+        <a:font script="Bopo" typeface="Microsoft JhengHei"/>
+        <a:font script="Java" typeface="Javanese Text"/>
+        <a:font script="Lisu" typeface="Segoe UI"/>
+        <a:font script="Mymr" typeface="Myanmar Text"/>
+        <a:font script="Nkoo" typeface="Ebrima"/>
+        <a:font script="Olck" typeface="Nirmala UI"/>
+        <a:font script="Osma" typeface="Ebrima"/>
+        <a:font script="Phag" typeface="Phagspa"/>
+        <a:font script="Syrn" typeface="Estrangelo Edessa"/>
+        <a:font script="Syrj" typeface="Estrangelo Edessa"/>
+        <a:font script="Syre" typeface="Estrangelo Edessa"/>
+        <a:font script="Sora" typeface="Nirmala UI"/>
+        <a:font script="Tale" typeface="Microsoft Tai Le"/>
+        <a:font script="Talu" typeface="Microsoft New Tai Lue"/>
+        <a:font script="Tfng" typeface="Ebrima"/>
+      </a:minorFont>
+    </a:fontScheme>
+    <a:fmtScheme name="Office">
+      <a:fillStyleLst>
+        <a:solidFill>
+          <a:schemeClr val="phClr"/>
+        </a:solidFill>
+        <a:gradFill rotWithShape="1">
+          <a:gsLst>
+            <a:gs pos="0">
+              <a:schemeClr val="phClr">
+                <a:lumMod val="110000"/>
+                <a:satMod val="105000"/>
+                <a:tint val="67000"/>
+              </a:schemeClr>
+            </a:gs>
+            <a:gs pos="50000">
+              <a:schemeClr val="phClr">
+                <a:lumMod val="105000"/>
+                <a:satMod val="103000"/>
+                <a:tint val="73000"/>
+              </a:schemeClr>
+            </a:gs>
+            <a:gs pos="100000">
+              <a:schemeClr val="phClr">
+                <a:lumMod val="105000"/>
+                <a:satMod val="109000"/>
+                <a:tint val="81000"/>
+              </a:schemeClr>
+            </a:gs>
+          </a:gsLst>
+          <a:lin ang="5400000" scaled="0"/>
+        </a:gradFill>
+        <a:gradFill rotWithShape="1">
+          <a:gsLst>
+            <a:gs pos="0">
+              <a:schemeClr val="phClr">
+                <a:satMod val="103000"/>
+                <a:lumMod val="102000"/>
+                <a:tint val="94000"/>
+              </a:schemeClr>
+            </a:gs>
+            <a:gs pos="50000">
+              <a:schemeClr val="phClr">
+                <a:satMod val="110000"/>
+                <a:lumMod val="100000"/>
+                <a:shade val="100000"/>
+              </a:schemeClr>
+            </a:gs>
+            <a:gs pos="100000">
+              <a:schemeClr val="phClr">
+                <a:lumMod val="99000"/>
+                <a:satMod val="120000"/>
+                <a:shade val="78000"/>
+              </a:schemeClr>
+            </a:gs>
+          </a:gsLst>
+          <a:lin ang="5400000" scaled="0"/>
+        </a:gradFill>
+      </a:fillStyleLst>
+      <a:lnStyleLst>
+        <a:ln w="12700" cap="flat" cmpd="sng" algn="ctr">
+          <a:solidFill>
+            <a:schemeClr val="phClr"/>
+          </a:solidFill>
+          <a:prstDash val="solid"/>
+          <a:miter lim="800000"/>
+        </a:ln>
+        <a:ln w="19050" cap="flat" cmpd="sng" algn="ctr">
+          <a:solidFill>
+            <a:schemeClr val="phClr"/>
+          </a:solidFill>
+          <a:prstDash val="solid"/>
+          <a:miter lim="800000"/>
+        </a:ln>
+        <a:ln w="25400" cap="flat" cmpd="sng" algn="ctr">
+          <a:solidFill>
+            <a:schemeClr val="phClr"/>
+          </a:solidFill>
+          <a:prstDash val="solid"/>
+          <a:miter lim="800000"/>
+        </a:ln>
+      </a:lnStyleLst>
+      <a:effectStyleLst>
+        <a:effectStyle>
+          <a:effectLst/>
+        </a:effectStyle>
+        <a:effectStyle>
+          <a:effectLst/>
+        </a:effectStyle>
+        <a:effectStyle>
+          <a:effectLst>
+            <a:outerShdw blurRad="57150" dist="19050" dir="5400000" algn="ctr" rotWithShape="0">
+              <a:srgbClr val="000000">
+                <a:alpha val="63000"/>
+              </a:srgbClr>
+            </a:outerShdw>
+          </a:effectLst>
+        </a:effectStyle>
+      </a:effectStyleLst>
+      <a:bgFillStyleLst>
+        <a:solidFill>
+          <a:schemeClr val="phClr"/>
+        </a:solidFill>
+        <a:solidFill>
+          <a:schemeClr val="phClr">
+            <a:tint val="95000"/>
+            <a:satMod val="170000"/>
+          </a:schemeClr>
+        </a:solidFill>
+        <a:gradFill rotWithShape="1">
+          <a:gsLst>
+            <a:gs pos="0">
+              <a:schemeClr val="phClr">
+                <a:tint val="93000"/>
+                <a:satMod val="150000"/>
+                <a:shade val="98000"/>
+                <a:lumMod val="102000"/>
+              </a:schemeClr>
+            </a:gs>
+            <a:gs pos="50000">
+              <a:schemeClr val="phClr">
+                <a:tint val="98000"/>
+                <a:satMod val="130000"/>
+                <a:shade val="90000"/>
+                <a:lumMod val="103000"/>
+              </a:schemeClr>
+            </a:gs>
+            <a:gs pos="100000">
+              <a:schemeClr val="phClr">
+                <a:shade val="63000"/>
+                <a:satMod val="120000"/>
+              </a:schemeClr>
+            </a:gs>
+          </a:gsLst>
+          <a:lin ang="5400000" scaled="0"/>
+        </a:gradFill>
+      </a:bgFillStyleLst>
+    </a:fmtScheme>
+  </a:themeElements>
+  <a:objectDefaults>
+    <a:lnDef>
+      <a:spPr/>
+      <a:bodyPr/>
+      <a:lstStyle/>
+      <a:style>
+        <a:lnRef idx="2">
+          <a:schemeClr val="accent1"/>
+        </a:lnRef>
+        <a:fillRef idx="0">
+          <a:schemeClr val="accent1"/>
+        </a:fillRef>
+        <a:effectRef idx="1">
+          <a:schemeClr val="accent1"/>
+        </a:effectRef>
+        <a:fontRef idx="minor">
+          <a:schemeClr val="tx1"/>
+        </a:fontRef>
+      </a:style>
+    </a:lnDef>
+  </a:objectDefaults>
+  <a:extraClrSchemeLst/>
+  <a:extLst>
+    <a:ext uri="{05A4C25C-085E-4340-85A3-A5531E510DB2}">
+      <thm15:themeFamily xmlns:thm15="http://schemas.microsoft.com/office/thememl/2012/main" name="Office Theme" id="{2E142A2C-CD16-42D6-873A-C26D2A0506FA}" vid="{1BDDFF52-6CD6-40A5-AB3C-68EB2F1E4D0A}"/>
+    </a:ext>
+  </a:extLst>
+</a:theme>
 </file>